--- a/reports/2026-04/meeting_260424/weekly_report_260427_plain.pptx
+++ b/reports/2026-04/meeting_260424/weekly_report_260427_plain.pptx
@@ -3498,7 +3498,7 @@
                 </a:solidFill>
                 <a:latin typeface="Microsoft JhengHei"/>
               </a:rPr>
-              <a:t>目前還不能只用 FPS 判斷瓶頸，</a:t>
+              <a:t>目前不能只用 FPS 判斷瓶頸，需要拆出 atomic、queue、payload、role imbalance 與 output allocation 等 metrics</a:t>
             </a:r>
             <a:r>
               <a:rPr lang="zh-CN" altLang="en-US" sz="1400" b="0">
@@ -3507,7 +3507,7 @@
                 </a:solidFill>
                 <a:latin typeface="Microsoft JhengHei"/>
               </a:rPr>
-              <a:t>需要</a:t>
+              <a:t/>
             </a:r>
             <a:r>
               <a:rPr lang="zh-CN" altLang="en-US" sz="1400">
@@ -3516,7 +3516,7 @@
                 </a:solidFill>
                 <a:latin typeface="Microsoft JhengHei"/>
               </a:rPr>
-              <a:t>進一步測量各種 </a:t>
+              <a:t/>
             </a:r>
             <a:r>
               <a:rPr lang="en-US" altLang="zh-CN" sz="1400">
@@ -3525,7 +3525,7 @@
                 </a:solidFill>
                 <a:latin typeface="Microsoft JhengHei"/>
               </a:rPr>
-              <a:t>metrics</a:t>
+              <a:t/>
             </a:r>
             <a:endParaRPr sz="1400" b="0">
               <a:solidFill>
@@ -3704,7 +3704,7 @@
                 </a:solidFill>
                 <a:latin typeface="Microsoft JhengHei"/>
               </a:rPr>
-              <a:t>metrics/profiling loop 提供證據，架構改動從瓶頸推導。</a:t>
+              <a:t>metrics/profiling loop 提供證據，optimization 從 producer-consumer 瓶頸推導。</a:t>
             </a:r>
           </a:p>
         </p:txBody>
@@ -4468,7 +4468,7 @@
                 </a:solidFill>
                 <a:latin typeface="Microsoft JhengHei"/>
               </a:rPr>
-              <a:t>研究定位：不</a:t>
+              <a:t>研究定位：software producer-consumer 做到盡可能快；用 metrics/profiling 找瓶頸，給 MTK mobile 優化方向。</a:t>
             </a:r>
             <a:r>
               <a:rPr lang="zh-TW" altLang="en-US" sz="1250" b="0">
@@ -4477,7 +4477,7 @@
                 </a:solidFill>
                 <a:latin typeface="Microsoft JhengHei"/>
               </a:rPr>
-              <a:t>只</a:t>
+              <a:t/>
             </a:r>
             <a:r>
               <a:rPr sz="1250" b="0">
@@ -4486,7 +4486,7 @@
                 </a:solidFill>
                 <a:latin typeface="Microsoft JhengHei"/>
               </a:rPr>
-              <a:t>是把 shader 寫快，而是 characterize software WorkGraph runtime 的成本，並說明哪些成本需要 runtime/API/hardware support。</a:t>
+              <a:t/>
             </a:r>
           </a:p>
         </p:txBody>
